--- a/clases/clase_01.pptx
+++ b/clases/clase_01.pptx
@@ -278,7 +278,7 @@
       </p15:sldGuideLst>
     </p:ext>
     <p:ext uri="GoogleSlidesCustomDataVersion2">
-      <go:slidesCustomData xmlns:go="http://customooxmlschemas.google.com/" xmlns:ahyp="http://schemas.microsoft.com/office/drawing/2018/hyperlinkcolor" xmlns:p15="http://schemas.microsoft.com/office/powerpoint/2012/main" xmlns:p14="http://schemas.microsoft.com/office/powerpoint/2010/main" xmlns:com="http://schemas.openxmlformats.org/drawingml/2006/compatibility" xmlns:pvml="urn:schemas-microsoft-com:office:powerpoint" xmlns:v="urn:schemas-microsoft-com:vml" xmlns:o="urn:schemas-microsoft-com:office:office" xmlns:dgm="http://schemas.openxmlformats.org/drawingml/2006/diagram" xmlns:c="http://schemas.openxmlformats.org/drawingml/2006/chart" xmlns:mv="urn:schemas-microsoft-com:mac:vml" xmlns:mc="http://schemas.openxmlformats.org/markup-compatibility/2006" xmlns="" r:id="rId20" roundtripDataSignature="AMtx7mgGryG9NiCHgwvnuxhxsNkmof1DBg=="/>
+      <go:slidesCustomData xmlns="" xmlns:mc="http://schemas.openxmlformats.org/markup-compatibility/2006" xmlns:mv="urn:schemas-microsoft-com:mac:vml" xmlns:c="http://schemas.openxmlformats.org/drawingml/2006/chart" xmlns:dgm="http://schemas.openxmlformats.org/drawingml/2006/diagram" xmlns:o="urn:schemas-microsoft-com:office:office" xmlns:v="urn:schemas-microsoft-com:vml" xmlns:pvml="urn:schemas-microsoft-com:office:powerpoint" xmlns:com="http://schemas.openxmlformats.org/drawingml/2006/compatibility" xmlns:p14="http://schemas.microsoft.com/office/powerpoint/2010/main" xmlns:p15="http://schemas.microsoft.com/office/powerpoint/2012/main" xmlns:ahyp="http://schemas.microsoft.com/office/drawing/2018/hyperlinkcolor" xmlns:go="http://customooxmlschemas.google.com/" r:id="rId20" roundtripDataSignature="AMtx7mgGryG9NiCHgwvnuxhxsNkmof1DBg=="/>
     </p:ext>
   </p:extLst>
 </p:presentation>
@@ -11019,6 +11019,131 @@
           <a:p>
             <a:endParaRPr lang="es-CL" dirty="0"/>
           </a:p>
+          <a:p>
+            <a:r>
+              <a:rPr lang="es-ES" dirty="0"/>
+              <a:t>⚠️Un </a:t>
+            </a:r>
+            <a:r>
+              <a:rPr lang="es-ES" dirty="0" err="1"/>
+              <a:t>warning</a:t>
+            </a:r>
+            <a:r>
+              <a:rPr lang="es-ES" dirty="0"/>
+              <a:t> relevante es la necesidad de estar siempre atentos a los posibles sesgos inconscientes dentro den la toma de decisiones:</a:t>
+            </a:r>
+          </a:p>
+          <a:p>
+            <a:endParaRPr lang="es-ES" dirty="0"/>
+          </a:p>
+          <a:p>
+            <a:pPr marL="285750" indent="-285750">
+              <a:buFontTx/>
+              <a:buChar char="-"/>
+            </a:pPr>
+            <a:r>
+              <a:rPr lang="es-ES" dirty="0" err="1"/>
+              <a:t>Confirmation</a:t>
+            </a:r>
+            <a:r>
+              <a:rPr lang="es-ES" dirty="0"/>
+              <a:t> </a:t>
+            </a:r>
+            <a:r>
+              <a:rPr lang="es-ES" dirty="0" err="1"/>
+              <a:t>bias</a:t>
+            </a:r>
+            <a:r>
+              <a:rPr lang="es-ES" dirty="0"/>
+              <a:t>: busca información que confirma mis creencias (contratación: </a:t>
+            </a:r>
+            <a:r>
+              <a:rPr lang="es-ES" dirty="0" err="1"/>
+              <a:t>cv</a:t>
+            </a:r>
+            <a:r>
+              <a:rPr lang="es-ES" dirty="0"/>
+              <a:t> versus entrevista)</a:t>
+            </a:r>
+          </a:p>
+          <a:p>
+            <a:pPr marL="285750" indent="-285750">
+              <a:buFontTx/>
+              <a:buChar char="-"/>
+            </a:pPr>
+            <a:r>
+              <a:rPr lang="es-ES" dirty="0" err="1"/>
+              <a:t>Anchoring</a:t>
+            </a:r>
+            <a:r>
+              <a:rPr lang="es-ES" dirty="0"/>
+              <a:t> </a:t>
+            </a:r>
+            <a:r>
+              <a:rPr lang="es-ES" dirty="0" err="1"/>
+              <a:t>bias</a:t>
+            </a:r>
+            <a:r>
+              <a:rPr lang="es-ES" dirty="0"/>
+              <a:t>: sobre confianza en la información inicial (precios del </a:t>
+            </a:r>
+            <a:r>
+              <a:rPr lang="es-ES" dirty="0" err="1"/>
+              <a:t>cyber</a:t>
+            </a:r>
+            <a:r>
+              <a:rPr lang="es-ES" dirty="0"/>
+              <a:t>)</a:t>
+            </a:r>
+          </a:p>
+          <a:p>
+            <a:pPr marL="285750" indent="-285750">
+              <a:buFontTx/>
+              <a:buChar char="-"/>
+            </a:pPr>
+            <a:r>
+              <a:rPr lang="es-ES" dirty="0" err="1"/>
+              <a:t>Loss</a:t>
+            </a:r>
+            <a:r>
+              <a:rPr lang="es-ES" dirty="0"/>
+              <a:t> </a:t>
+            </a:r>
+            <a:r>
+              <a:rPr lang="es-ES" dirty="0" err="1"/>
+              <a:t>aversion</a:t>
+            </a:r>
+            <a:r>
+              <a:rPr lang="es-ES" dirty="0"/>
+              <a:t>: preferencia hacia evadir pérdidas sobre (perder un 10% de descuento versus ganar un 10% de descuento)</a:t>
+            </a:r>
+          </a:p>
+          <a:p>
+            <a:pPr marL="285750" indent="-285750">
+              <a:buFontTx/>
+              <a:buChar char="-"/>
+            </a:pPr>
+            <a:r>
+              <a:rPr lang="es-ES" dirty="0" err="1"/>
+              <a:t>Available</a:t>
+            </a:r>
+            <a:r>
+              <a:rPr lang="es-ES" dirty="0"/>
+              <a:t> </a:t>
+            </a:r>
+            <a:r>
+              <a:rPr lang="es-ES" dirty="0" err="1"/>
+              <a:t>heuristic</a:t>
+            </a:r>
+            <a:r>
+              <a:rPr lang="es-ES" dirty="0"/>
+              <a:t>: sobre estimar la frecuencia de un evento en base a lo fácil que son de recordar (caída de aviones)</a:t>
+            </a:r>
+            <a:endParaRPr lang="es-CL" dirty="0"/>
+          </a:p>
+          <a:p>
+            <a:endParaRPr lang="es-CL" dirty="0"/>
+          </a:p>
         </p:txBody>
       </p:sp>
     </p:spTree>
@@ -11591,13 +11716,23 @@
             <a:endParaRPr lang="es-CL" dirty="0"/>
           </a:p>
           <a:p>
-            <a:r>
-              <a:rPr lang="es-CL"/>
-              <a:t>- Pronósticos </a:t>
-            </a:r>
+            <a:pPr marL="285750" indent="-285750">
+              <a:buFontTx/>
+              <a:buChar char="-"/>
+            </a:pPr>
             <a:r>
               <a:rPr lang="es-CL" dirty="0"/>
-              <a:t>y simulaciones en base a datos de atenciones respiratorias.</a:t>
+              <a:t>Pronósticos y simulaciones en base a datos de atenciones respiratorias.</a:t>
+            </a:r>
+          </a:p>
+          <a:p>
+            <a:pPr marL="285750" indent="-285750">
+              <a:buFontTx/>
+              <a:buChar char="-"/>
+            </a:pPr>
+            <a:r>
+              <a:rPr lang="es-CL" dirty="0"/>
+              <a:t>Simulación</a:t>
             </a:r>
           </a:p>
           <a:p>
